--- a/assets/powerpoints/module-n2-panier/B1-lire-un-prix-et-le-dire.pptx
+++ b/assets/powerpoints/module-n2-panier/B1-lire-un-prix-et-le-dire.pptx
@@ -10647,7 +10647,25 @@
                 </a:solidFill>
                 <a:latin typeface="Verdana"/>
               </a:rPr>
-              <a:t>le prix d'&lt;b&gt;un kilo&lt;/b&gt; seulement</a:t>
+              <a:t>le prix d'</a:t>
+            </a:r>
+            <a:r>
+              <a:rPr sz="1800" b="1" i="0">
+                <a:solidFill>
+                  <a:srgbClr val="3A3D40"/>
+                </a:solidFill>
+                <a:latin typeface="Verdana"/>
+              </a:rPr>
+              <a:t>un kilo</a:t>
+            </a:r>
+            <a:r>
+              <a:rPr sz="1800" b="0" i="0">
+                <a:solidFill>
+                  <a:srgbClr val="3A3D40"/>
+                </a:solidFill>
+                <a:latin typeface="Verdana"/>
+              </a:rPr>
+              <a:t> seulement</a:t>
             </a:r>
           </a:p>
         </p:txBody>
@@ -11319,7 +11337,61 @@
                 </a:solidFill>
                 <a:latin typeface="Verdana"/>
               </a:rPr>
-              <a:t>On écrit &lt;b&gt;3,99 $&lt;/b&gt;. On dit « &lt;b&gt;trois dollars quatre-vingt-dix-neuf&lt;/b&gt; », ou, plus court, « &lt;b&gt;trois quatre-vingt-dix-neuf&lt;/b&gt; ». À la caisse, c'est presque toujours la forme courte qu'on entend.</a:t>
+              <a:t>On écrit </a:t>
+            </a:r>
+            <a:r>
+              <a:rPr sz="2000" b="1" i="0">
+                <a:solidFill>
+                  <a:srgbClr val="4B4F52"/>
+                </a:solidFill>
+                <a:latin typeface="Verdana"/>
+              </a:rPr>
+              <a:t>3,99 $</a:t>
+            </a:r>
+            <a:r>
+              <a:rPr sz="2000" b="0" i="0">
+                <a:solidFill>
+                  <a:srgbClr val="4B4F52"/>
+                </a:solidFill>
+                <a:latin typeface="Verdana"/>
+              </a:rPr>
+              <a:t>. On dit « </a:t>
+            </a:r>
+            <a:r>
+              <a:rPr sz="2000" b="1" i="0">
+                <a:solidFill>
+                  <a:srgbClr val="4B4F52"/>
+                </a:solidFill>
+                <a:latin typeface="Verdana"/>
+              </a:rPr>
+              <a:t>trois dollars quatre-vingt-dix-neuf</a:t>
+            </a:r>
+            <a:r>
+              <a:rPr sz="2000" b="0" i="0">
+                <a:solidFill>
+                  <a:srgbClr val="4B4F52"/>
+                </a:solidFill>
+                <a:latin typeface="Verdana"/>
+              </a:rPr>
+              <a:t> », ou, plus court, « </a:t>
+            </a:r>
+            <a:r>
+              <a:rPr sz="2000" b="1" i="0">
+                <a:solidFill>
+                  <a:srgbClr val="4B4F52"/>
+                </a:solidFill>
+                <a:latin typeface="Verdana"/>
+              </a:rPr>
+              <a:t>trois quatre-vingt-dix-neuf</a:t>
+            </a:r>
+            <a:r>
+              <a:rPr sz="2000" b="0" i="0">
+                <a:solidFill>
+                  <a:srgbClr val="4B4F52"/>
+                </a:solidFill>
+                <a:latin typeface="Verdana"/>
+              </a:rPr>
+              <a:t> ». À la caisse, c'est presque toujours la forme courte qu'on entend.</a:t>
             </a:r>
           </a:p>
         </p:txBody>
